--- a/lab6/Лабораторная_6_вариант_9.pptx
+++ b/lab6/Лабораторная_6_вариант_9.pptx
@@ -3565,7 +3565,7 @@
               </a:defRPr>
             </a:pPr>
             <a:r>
-              <a:t>Что именно путается</a:t>
+              <a:t>Как читать матрицы ошибок</a:t>
             </a:r>
           </a:p>
         </p:txBody>
@@ -3607,7 +3607,7 @@
               </a:defRPr>
             </a:pPr>
             <a:r>
-              <a:t>Обе сети ошибаются на одной и той же группе классов</a:t>
+              <a:t>Строки — истинные классы, столбцы — предсказанные</a:t>
             </a:r>
           </a:p>
         </p:txBody>
@@ -3698,1093 +3698,13 @@
       </p:sp>
       <p:sp>
         <p:nvSpPr>
-          <p:cNvPr id="7" name="TextBox 6"/>
-          <p:cNvSpPr txBox="1"/>
-          <p:nvPr/>
-        </p:nvSpPr>
-        <p:spPr>
-          <a:xfrm>
-            <a:off x="822960" y="2057400"/>
-            <a:ext cx="3544214" cy="237744"/>
-          </a:xfrm>
-          <a:prstGeom prst="rect">
-            <a:avLst/>
-          </a:prstGeom>
-          <a:noFill/>
-        </p:spPr>
-        <p:txBody>
-          <a:bodyPr wrap="square" lIns="0" rIns="0" tIns="0" bIns="0" anchor="t">
-            <a:spAutoFit/>
-          </a:bodyPr>
-          <a:lstStyle/>
-          <a:p>
-            <a:pPr algn="l">
-              <a:lnSpc>
-                <a:spcPct val="128000"/>
-              </a:lnSpc>
-              <a:spcAft>
-                <a:spcPts val="0"/>
-              </a:spcAft>
-              <a:defRPr sz="1050" b="1">
-                <a:solidFill>
-                  <a:srgbClr val="5B6070"/>
-                </a:solidFill>
-                <a:latin typeface="Helvetica Neue"/>
-              </a:defRPr>
-            </a:pPr>
-            <a:r>
-              <a:t>CNN + L2: истинный → предсказанный</a:t>
-            </a:r>
-          </a:p>
-        </p:txBody>
-      </p:sp>
-      <p:sp>
-        <p:nvSpPr>
-          <p:cNvPr id="8" name="TextBox 7"/>
-          <p:cNvSpPr txBox="1"/>
-          <p:nvPr/>
-        </p:nvSpPr>
-        <p:spPr>
-          <a:xfrm>
-            <a:off x="4476902" y="2057400"/>
-            <a:ext cx="1174089" cy="237744"/>
-          </a:xfrm>
-          <a:prstGeom prst="rect">
-            <a:avLst/>
-          </a:prstGeom>
-          <a:noFill/>
-        </p:spPr>
-        <p:txBody>
-          <a:bodyPr wrap="square" lIns="0" rIns="0" tIns="0" bIns="0" anchor="t">
-            <a:spAutoFit/>
-          </a:bodyPr>
-          <a:lstStyle/>
-          <a:p>
-            <a:pPr algn="l">
-              <a:lnSpc>
-                <a:spcPct val="128000"/>
-              </a:lnSpc>
-              <a:spcAft>
-                <a:spcPts val="0"/>
-              </a:spcAft>
-              <a:defRPr sz="1050" b="1">
-                <a:solidFill>
-                  <a:srgbClr val="5B6070"/>
-                </a:solidFill>
-                <a:latin typeface="Helvetica Neue"/>
-              </a:defRPr>
-            </a:pPr>
-            <a:r>
-              <a:t>Ошибок</a:t>
-            </a:r>
-          </a:p>
-        </p:txBody>
-      </p:sp>
-      <p:sp>
-        <p:nvSpPr>
-          <p:cNvPr id="9" name="Rectangle 8"/>
+          <p:cNvPr id="7" name="Rounded Rectangle 6"/>
           <p:cNvSpPr/>
           <p:nvPr/>
         </p:nvSpPr>
         <p:spPr>
           <a:xfrm>
-            <a:off x="822960" y="2331720"/>
-            <a:ext cx="4937760" cy="12801"/>
-          </a:xfrm>
-          <a:prstGeom prst="rect">
-            <a:avLst/>
-          </a:prstGeom>
-          <a:solidFill>
-            <a:srgbClr val="C9D0DE"/>
-          </a:solidFill>
-          <a:ln>
-            <a:noFill/>
-          </a:ln>
-          <a:effectLst/>
-        </p:spPr>
-        <p:txBody>
-          <a:bodyPr rtlCol="0" anchor="ctr" wrap="square"/>
-          <a:lstStyle/>
-          <a:p>
-            <a:pPr algn="ctr"/>
-          </a:p>
-        </p:txBody>
-      </p:sp>
-      <p:sp>
-        <p:nvSpPr>
-          <p:cNvPr id="10" name="TextBox 9"/>
-          <p:cNvSpPr txBox="1"/>
-          <p:nvPr/>
-        </p:nvSpPr>
-        <p:spPr>
-          <a:xfrm>
-            <a:off x="822960" y="2423160"/>
-            <a:ext cx="3544214" cy="237744"/>
-          </a:xfrm>
-          <a:prstGeom prst="rect">
-            <a:avLst/>
-          </a:prstGeom>
-          <a:noFill/>
-        </p:spPr>
-        <p:txBody>
-          <a:bodyPr wrap="square" lIns="0" rIns="0" tIns="0" bIns="0" anchor="t">
-            <a:spAutoFit/>
-          </a:bodyPr>
-          <a:lstStyle/>
-          <a:p>
-            <a:pPr algn="l">
-              <a:lnSpc>
-                <a:spcPct val="128000"/>
-              </a:lnSpc>
-              <a:spcAft>
-                <a:spcPts val="0"/>
-              </a:spcAft>
-              <a:defRPr sz="1150" b="0">
-                <a:solidFill>
-                  <a:srgbClr val="15171C"/>
-                </a:solidFill>
-                <a:latin typeface="Helvetica Neue"/>
-              </a:defRPr>
-            </a:pPr>
-            <a:r>
-              <a:t>Coat → Shirt</a:t>
-            </a:r>
-          </a:p>
-        </p:txBody>
-      </p:sp>
-      <p:sp>
-        <p:nvSpPr>
-          <p:cNvPr id="11" name="TextBox 10"/>
-          <p:cNvSpPr txBox="1"/>
-          <p:nvPr/>
-        </p:nvSpPr>
-        <p:spPr>
-          <a:xfrm>
-            <a:off x="4476902" y="2423160"/>
-            <a:ext cx="1174089" cy="237744"/>
-          </a:xfrm>
-          <a:prstGeom prst="rect">
-            <a:avLst/>
-          </a:prstGeom>
-          <a:noFill/>
-        </p:spPr>
-        <p:txBody>
-          <a:bodyPr wrap="square" lIns="0" rIns="0" tIns="0" bIns="0" anchor="t">
-            <a:spAutoFit/>
-          </a:bodyPr>
-          <a:lstStyle/>
-          <a:p>
-            <a:pPr algn="l">
-              <a:lnSpc>
-                <a:spcPct val="128000"/>
-              </a:lnSpc>
-              <a:spcAft>
-                <a:spcPts val="0"/>
-              </a:spcAft>
-              <a:defRPr sz="1150" b="0">
-                <a:solidFill>
-                  <a:srgbClr val="15171C"/>
-                </a:solidFill>
-                <a:latin typeface="Helvetica Neue"/>
-              </a:defRPr>
-            </a:pPr>
-            <a:r>
-              <a:t>121</a:t>
-            </a:r>
-          </a:p>
-        </p:txBody>
-      </p:sp>
-      <p:sp>
-        <p:nvSpPr>
-          <p:cNvPr id="12" name="Rectangle 11"/>
-          <p:cNvSpPr/>
-          <p:nvPr/>
-        </p:nvSpPr>
-        <p:spPr>
-          <a:xfrm>
-            <a:off x="822960" y="2770632"/>
-            <a:ext cx="4937760" cy="7315"/>
-          </a:xfrm>
-          <a:prstGeom prst="rect">
-            <a:avLst/>
-          </a:prstGeom>
-          <a:solidFill>
-            <a:srgbClr val="C9D0DE"/>
-          </a:solidFill>
-          <a:ln>
-            <a:noFill/>
-          </a:ln>
-          <a:effectLst/>
-        </p:spPr>
-        <p:txBody>
-          <a:bodyPr rtlCol="0" anchor="ctr" wrap="square"/>
-          <a:lstStyle/>
-          <a:p>
-            <a:pPr algn="ctr"/>
-          </a:p>
-        </p:txBody>
-      </p:sp>
-      <p:sp>
-        <p:nvSpPr>
-          <p:cNvPr id="13" name="TextBox 12"/>
-          <p:cNvSpPr txBox="1"/>
-          <p:nvPr/>
-        </p:nvSpPr>
-        <p:spPr>
-          <a:xfrm>
-            <a:off x="822960" y="2843784"/>
-            <a:ext cx="3544214" cy="237744"/>
-          </a:xfrm>
-          <a:prstGeom prst="rect">
-            <a:avLst/>
-          </a:prstGeom>
-          <a:noFill/>
-        </p:spPr>
-        <p:txBody>
-          <a:bodyPr wrap="square" lIns="0" rIns="0" tIns="0" bIns="0" anchor="t">
-            <a:spAutoFit/>
-          </a:bodyPr>
-          <a:lstStyle/>
-          <a:p>
-            <a:pPr algn="l">
-              <a:lnSpc>
-                <a:spcPct val="128000"/>
-              </a:lnSpc>
-              <a:spcAft>
-                <a:spcPts val="0"/>
-              </a:spcAft>
-              <a:defRPr sz="1150" b="0">
-                <a:solidFill>
-                  <a:srgbClr val="15171C"/>
-                </a:solidFill>
-                <a:latin typeface="Helvetica Neue"/>
-              </a:defRPr>
-            </a:pPr>
-            <a:r>
-              <a:t>Pullover → Shirt</a:t>
-            </a:r>
-          </a:p>
-        </p:txBody>
-      </p:sp>
-      <p:sp>
-        <p:nvSpPr>
-          <p:cNvPr id="14" name="TextBox 13"/>
-          <p:cNvSpPr txBox="1"/>
-          <p:nvPr/>
-        </p:nvSpPr>
-        <p:spPr>
-          <a:xfrm>
-            <a:off x="4476902" y="2843784"/>
-            <a:ext cx="1174089" cy="237744"/>
-          </a:xfrm>
-          <a:prstGeom prst="rect">
-            <a:avLst/>
-          </a:prstGeom>
-          <a:noFill/>
-        </p:spPr>
-        <p:txBody>
-          <a:bodyPr wrap="square" lIns="0" rIns="0" tIns="0" bIns="0" anchor="t">
-            <a:spAutoFit/>
-          </a:bodyPr>
-          <a:lstStyle/>
-          <a:p>
-            <a:pPr algn="l">
-              <a:lnSpc>
-                <a:spcPct val="128000"/>
-              </a:lnSpc>
-              <a:spcAft>
-                <a:spcPts val="0"/>
-              </a:spcAft>
-              <a:defRPr sz="1150" b="0">
-                <a:solidFill>
-                  <a:srgbClr val="15171C"/>
-                </a:solidFill>
-                <a:latin typeface="Helvetica Neue"/>
-              </a:defRPr>
-            </a:pPr>
-            <a:r>
-              <a:t>68</a:t>
-            </a:r>
-          </a:p>
-        </p:txBody>
-      </p:sp>
-      <p:sp>
-        <p:nvSpPr>
-          <p:cNvPr id="15" name="Rectangle 14"/>
-          <p:cNvSpPr/>
-          <p:nvPr/>
-        </p:nvSpPr>
-        <p:spPr>
-          <a:xfrm>
-            <a:off x="822960" y="3191256"/>
-            <a:ext cx="4937760" cy="7315"/>
-          </a:xfrm>
-          <a:prstGeom prst="rect">
-            <a:avLst/>
-          </a:prstGeom>
-          <a:solidFill>
-            <a:srgbClr val="C9D0DE"/>
-          </a:solidFill>
-          <a:ln>
-            <a:noFill/>
-          </a:ln>
-          <a:effectLst/>
-        </p:spPr>
-        <p:txBody>
-          <a:bodyPr rtlCol="0" anchor="ctr" wrap="square"/>
-          <a:lstStyle/>
-          <a:p>
-            <a:pPr algn="ctr"/>
-          </a:p>
-        </p:txBody>
-      </p:sp>
-      <p:sp>
-        <p:nvSpPr>
-          <p:cNvPr id="16" name="TextBox 15"/>
-          <p:cNvSpPr txBox="1"/>
-          <p:nvPr/>
-        </p:nvSpPr>
-        <p:spPr>
-          <a:xfrm>
-            <a:off x="822960" y="3264408"/>
-            <a:ext cx="3544214" cy="237744"/>
-          </a:xfrm>
-          <a:prstGeom prst="rect">
-            <a:avLst/>
-          </a:prstGeom>
-          <a:noFill/>
-        </p:spPr>
-        <p:txBody>
-          <a:bodyPr wrap="square" lIns="0" rIns="0" tIns="0" bIns="0" anchor="t">
-            <a:spAutoFit/>
-          </a:bodyPr>
-          <a:lstStyle/>
-          <a:p>
-            <a:pPr algn="l">
-              <a:lnSpc>
-                <a:spcPct val="128000"/>
-              </a:lnSpc>
-              <a:spcAft>
-                <a:spcPts val="0"/>
-              </a:spcAft>
-              <a:defRPr sz="1150" b="0">
-                <a:solidFill>
-                  <a:srgbClr val="15171C"/>
-                </a:solidFill>
-                <a:latin typeface="Helvetica Neue"/>
-              </a:defRPr>
-            </a:pPr>
-            <a:r>
-              <a:t>T-shirt/top → Shirt</a:t>
-            </a:r>
-          </a:p>
-        </p:txBody>
-      </p:sp>
-      <p:sp>
-        <p:nvSpPr>
-          <p:cNvPr id="17" name="TextBox 16"/>
-          <p:cNvSpPr txBox="1"/>
-          <p:nvPr/>
-        </p:nvSpPr>
-        <p:spPr>
-          <a:xfrm>
-            <a:off x="4476902" y="3264408"/>
-            <a:ext cx="1174089" cy="237744"/>
-          </a:xfrm>
-          <a:prstGeom prst="rect">
-            <a:avLst/>
-          </a:prstGeom>
-          <a:noFill/>
-        </p:spPr>
-        <p:txBody>
-          <a:bodyPr wrap="square" lIns="0" rIns="0" tIns="0" bIns="0" anchor="t">
-            <a:spAutoFit/>
-          </a:bodyPr>
-          <a:lstStyle/>
-          <a:p>
-            <a:pPr algn="l">
-              <a:lnSpc>
-                <a:spcPct val="128000"/>
-              </a:lnSpc>
-              <a:spcAft>
-                <a:spcPts val="0"/>
-              </a:spcAft>
-              <a:defRPr sz="1150" b="0">
-                <a:solidFill>
-                  <a:srgbClr val="15171C"/>
-                </a:solidFill>
-                <a:latin typeface="Helvetica Neue"/>
-              </a:defRPr>
-            </a:pPr>
-            <a:r>
-              <a:t>46</a:t>
-            </a:r>
-          </a:p>
-        </p:txBody>
-      </p:sp>
-      <p:sp>
-        <p:nvSpPr>
-          <p:cNvPr id="18" name="Rectangle 17"/>
-          <p:cNvSpPr/>
-          <p:nvPr/>
-        </p:nvSpPr>
-        <p:spPr>
-          <a:xfrm>
-            <a:off x="822960" y="3611880"/>
-            <a:ext cx="4937760" cy="7315"/>
-          </a:xfrm>
-          <a:prstGeom prst="rect">
-            <a:avLst/>
-          </a:prstGeom>
-          <a:solidFill>
-            <a:srgbClr val="C9D0DE"/>
-          </a:solidFill>
-          <a:ln>
-            <a:noFill/>
-          </a:ln>
-          <a:effectLst/>
-        </p:spPr>
-        <p:txBody>
-          <a:bodyPr rtlCol="0" anchor="ctr" wrap="square"/>
-          <a:lstStyle/>
-          <a:p>
-            <a:pPr algn="ctr"/>
-          </a:p>
-        </p:txBody>
-      </p:sp>
-      <p:sp>
-        <p:nvSpPr>
-          <p:cNvPr id="19" name="TextBox 18"/>
-          <p:cNvSpPr txBox="1"/>
-          <p:nvPr/>
-        </p:nvSpPr>
-        <p:spPr>
-          <a:xfrm>
-            <a:off x="822960" y="3685032"/>
-            <a:ext cx="3544214" cy="237744"/>
-          </a:xfrm>
-          <a:prstGeom prst="rect">
-            <a:avLst/>
-          </a:prstGeom>
-          <a:noFill/>
-        </p:spPr>
-        <p:txBody>
-          <a:bodyPr wrap="square" lIns="0" rIns="0" tIns="0" bIns="0" anchor="t">
-            <a:spAutoFit/>
-          </a:bodyPr>
-          <a:lstStyle/>
-          <a:p>
-            <a:pPr algn="l">
-              <a:lnSpc>
-                <a:spcPct val="128000"/>
-              </a:lnSpc>
-              <a:spcAft>
-                <a:spcPts val="0"/>
-              </a:spcAft>
-              <a:defRPr sz="1150" b="0">
-                <a:solidFill>
-                  <a:srgbClr val="15171C"/>
-                </a:solidFill>
-                <a:latin typeface="Helvetica Neue"/>
-              </a:defRPr>
-            </a:pPr>
-            <a:r>
-              <a:t>Bag → Shirt</a:t>
-            </a:r>
-          </a:p>
-        </p:txBody>
-      </p:sp>
-      <p:sp>
-        <p:nvSpPr>
-          <p:cNvPr id="20" name="TextBox 19"/>
-          <p:cNvSpPr txBox="1"/>
-          <p:nvPr/>
-        </p:nvSpPr>
-        <p:spPr>
-          <a:xfrm>
-            <a:off x="4476902" y="3685032"/>
-            <a:ext cx="1174089" cy="237744"/>
-          </a:xfrm>
-          <a:prstGeom prst="rect">
-            <a:avLst/>
-          </a:prstGeom>
-          <a:noFill/>
-        </p:spPr>
-        <p:txBody>
-          <a:bodyPr wrap="square" lIns="0" rIns="0" tIns="0" bIns="0" anchor="t">
-            <a:spAutoFit/>
-          </a:bodyPr>
-          <a:lstStyle/>
-          <a:p>
-            <a:pPr algn="l">
-              <a:lnSpc>
-                <a:spcPct val="128000"/>
-              </a:lnSpc>
-              <a:spcAft>
-                <a:spcPts val="0"/>
-              </a:spcAft>
-              <a:defRPr sz="1150" b="0">
-                <a:solidFill>
-                  <a:srgbClr val="15171C"/>
-                </a:solidFill>
-                <a:latin typeface="Helvetica Neue"/>
-              </a:defRPr>
-            </a:pPr>
-            <a:r>
-              <a:t>27</a:t>
-            </a:r>
-          </a:p>
-        </p:txBody>
-      </p:sp>
-      <p:sp>
-        <p:nvSpPr>
-          <p:cNvPr id="21" name="TextBox 20"/>
-          <p:cNvSpPr txBox="1"/>
-          <p:nvPr/>
-        </p:nvSpPr>
-        <p:spPr>
-          <a:xfrm>
-            <a:off x="6428232" y="2057400"/>
-            <a:ext cx="3544214" cy="237744"/>
-          </a:xfrm>
-          <a:prstGeom prst="rect">
-            <a:avLst/>
-          </a:prstGeom>
-          <a:noFill/>
-        </p:spPr>
-        <p:txBody>
-          <a:bodyPr wrap="square" lIns="0" rIns="0" tIns="0" bIns="0" anchor="t">
-            <a:spAutoFit/>
-          </a:bodyPr>
-          <a:lstStyle/>
-          <a:p>
-            <a:pPr algn="l">
-              <a:lnSpc>
-                <a:spcPct val="128000"/>
-              </a:lnSpc>
-              <a:spcAft>
-                <a:spcPts val="0"/>
-              </a:spcAft>
-              <a:defRPr sz="1050" b="1">
-                <a:solidFill>
-                  <a:srgbClr val="5B6070"/>
-                </a:solidFill>
-                <a:latin typeface="Helvetica Neue"/>
-              </a:defRPr>
-            </a:pPr>
-            <a:r>
-              <a:t>CNN + Dropout: истинный → предсказанный</a:t>
-            </a:r>
-          </a:p>
-        </p:txBody>
-      </p:sp>
-      <p:sp>
-        <p:nvSpPr>
-          <p:cNvPr id="22" name="TextBox 21"/>
-          <p:cNvSpPr txBox="1"/>
-          <p:nvPr/>
-        </p:nvSpPr>
-        <p:spPr>
-          <a:xfrm>
-            <a:off x="10082174" y="2057400"/>
-            <a:ext cx="1174089" cy="237744"/>
-          </a:xfrm>
-          <a:prstGeom prst="rect">
-            <a:avLst/>
-          </a:prstGeom>
-          <a:noFill/>
-        </p:spPr>
-        <p:txBody>
-          <a:bodyPr wrap="square" lIns="0" rIns="0" tIns="0" bIns="0" anchor="t">
-            <a:spAutoFit/>
-          </a:bodyPr>
-          <a:lstStyle/>
-          <a:p>
-            <a:pPr algn="l">
-              <a:lnSpc>
-                <a:spcPct val="128000"/>
-              </a:lnSpc>
-              <a:spcAft>
-                <a:spcPts val="0"/>
-              </a:spcAft>
-              <a:defRPr sz="1050" b="1">
-                <a:solidFill>
-                  <a:srgbClr val="5B6070"/>
-                </a:solidFill>
-                <a:latin typeface="Helvetica Neue"/>
-              </a:defRPr>
-            </a:pPr>
-            <a:r>
-              <a:t>Ошибок</a:t>
-            </a:r>
-          </a:p>
-        </p:txBody>
-      </p:sp>
-      <p:sp>
-        <p:nvSpPr>
-          <p:cNvPr id="23" name="Rectangle 22"/>
-          <p:cNvSpPr/>
-          <p:nvPr/>
-        </p:nvSpPr>
-        <p:spPr>
-          <a:xfrm>
-            <a:off x="6428232" y="2331720"/>
-            <a:ext cx="4937760" cy="12801"/>
-          </a:xfrm>
-          <a:prstGeom prst="rect">
-            <a:avLst/>
-          </a:prstGeom>
-          <a:solidFill>
-            <a:srgbClr val="C9D0DE"/>
-          </a:solidFill>
-          <a:ln>
-            <a:noFill/>
-          </a:ln>
-          <a:effectLst/>
-        </p:spPr>
-        <p:txBody>
-          <a:bodyPr rtlCol="0" anchor="ctr" wrap="square"/>
-          <a:lstStyle/>
-          <a:p>
-            <a:pPr algn="ctr"/>
-          </a:p>
-        </p:txBody>
-      </p:sp>
-      <p:sp>
-        <p:nvSpPr>
-          <p:cNvPr id="24" name="TextBox 23"/>
-          <p:cNvSpPr txBox="1"/>
-          <p:nvPr/>
-        </p:nvSpPr>
-        <p:spPr>
-          <a:xfrm>
-            <a:off x="6428232" y="2423160"/>
-            <a:ext cx="3544214" cy="237744"/>
-          </a:xfrm>
-          <a:prstGeom prst="rect">
-            <a:avLst/>
-          </a:prstGeom>
-          <a:noFill/>
-        </p:spPr>
-        <p:txBody>
-          <a:bodyPr wrap="square" lIns="0" rIns="0" tIns="0" bIns="0" anchor="t">
-            <a:spAutoFit/>
-          </a:bodyPr>
-          <a:lstStyle/>
-          <a:p>
-            <a:pPr algn="l">
-              <a:lnSpc>
-                <a:spcPct val="128000"/>
-              </a:lnSpc>
-              <a:spcAft>
-                <a:spcPts val="0"/>
-              </a:spcAft>
-              <a:defRPr sz="1150" b="0">
-                <a:solidFill>
-                  <a:srgbClr val="15171C"/>
-                </a:solidFill>
-                <a:latin typeface="Helvetica Neue"/>
-              </a:defRPr>
-            </a:pPr>
-            <a:r>
-              <a:t>Shirt → T-shirt/top</a:t>
-            </a:r>
-          </a:p>
-        </p:txBody>
-      </p:sp>
-      <p:sp>
-        <p:nvSpPr>
-          <p:cNvPr id="25" name="TextBox 24"/>
-          <p:cNvSpPr txBox="1"/>
-          <p:nvPr/>
-        </p:nvSpPr>
-        <p:spPr>
-          <a:xfrm>
-            <a:off x="10082174" y="2423160"/>
-            <a:ext cx="1174089" cy="237744"/>
-          </a:xfrm>
-          <a:prstGeom prst="rect">
-            <a:avLst/>
-          </a:prstGeom>
-          <a:noFill/>
-        </p:spPr>
-        <p:txBody>
-          <a:bodyPr wrap="square" lIns="0" rIns="0" tIns="0" bIns="0" anchor="t">
-            <a:spAutoFit/>
-          </a:bodyPr>
-          <a:lstStyle/>
-          <a:p>
-            <a:pPr algn="l">
-              <a:lnSpc>
-                <a:spcPct val="128000"/>
-              </a:lnSpc>
-              <a:spcAft>
-                <a:spcPts val="0"/>
-              </a:spcAft>
-              <a:defRPr sz="1150" b="0">
-                <a:solidFill>
-                  <a:srgbClr val="15171C"/>
-                </a:solidFill>
-                <a:latin typeface="Helvetica Neue"/>
-              </a:defRPr>
-            </a:pPr>
-            <a:r>
-              <a:t>55</a:t>
-            </a:r>
-          </a:p>
-        </p:txBody>
-      </p:sp>
-      <p:sp>
-        <p:nvSpPr>
-          <p:cNvPr id="26" name="Rectangle 25"/>
-          <p:cNvSpPr/>
-          <p:nvPr/>
-        </p:nvSpPr>
-        <p:spPr>
-          <a:xfrm>
-            <a:off x="6428232" y="2770632"/>
-            <a:ext cx="4937760" cy="7315"/>
-          </a:xfrm>
-          <a:prstGeom prst="rect">
-            <a:avLst/>
-          </a:prstGeom>
-          <a:solidFill>
-            <a:srgbClr val="C9D0DE"/>
-          </a:solidFill>
-          <a:ln>
-            <a:noFill/>
-          </a:ln>
-          <a:effectLst/>
-        </p:spPr>
-        <p:txBody>
-          <a:bodyPr rtlCol="0" anchor="ctr" wrap="square"/>
-          <a:lstStyle/>
-          <a:p>
-            <a:pPr algn="ctr"/>
-          </a:p>
-        </p:txBody>
-      </p:sp>
-      <p:sp>
-        <p:nvSpPr>
-          <p:cNvPr id="27" name="TextBox 26"/>
-          <p:cNvSpPr txBox="1"/>
-          <p:nvPr/>
-        </p:nvSpPr>
-        <p:spPr>
-          <a:xfrm>
-            <a:off x="6428232" y="2843784"/>
-            <a:ext cx="3544214" cy="237744"/>
-          </a:xfrm>
-          <a:prstGeom prst="rect">
-            <a:avLst/>
-          </a:prstGeom>
-          <a:noFill/>
-        </p:spPr>
-        <p:txBody>
-          <a:bodyPr wrap="square" lIns="0" rIns="0" tIns="0" bIns="0" anchor="t">
-            <a:spAutoFit/>
-          </a:bodyPr>
-          <a:lstStyle/>
-          <a:p>
-            <a:pPr algn="l">
-              <a:lnSpc>
-                <a:spcPct val="128000"/>
-              </a:lnSpc>
-              <a:spcAft>
-                <a:spcPts val="0"/>
-              </a:spcAft>
-              <a:defRPr sz="1150" b="0">
-                <a:solidFill>
-                  <a:srgbClr val="15171C"/>
-                </a:solidFill>
-                <a:latin typeface="Helvetica Neue"/>
-              </a:defRPr>
-            </a:pPr>
-            <a:r>
-              <a:t>Shirt → Coat</a:t>
-            </a:r>
-          </a:p>
-        </p:txBody>
-      </p:sp>
-      <p:sp>
-        <p:nvSpPr>
-          <p:cNvPr id="28" name="TextBox 27"/>
-          <p:cNvSpPr txBox="1"/>
-          <p:nvPr/>
-        </p:nvSpPr>
-        <p:spPr>
-          <a:xfrm>
-            <a:off x="10082174" y="2843784"/>
-            <a:ext cx="1174089" cy="237744"/>
-          </a:xfrm>
-          <a:prstGeom prst="rect">
-            <a:avLst/>
-          </a:prstGeom>
-          <a:noFill/>
-        </p:spPr>
-        <p:txBody>
-          <a:bodyPr wrap="square" lIns="0" rIns="0" tIns="0" bIns="0" anchor="t">
-            <a:spAutoFit/>
-          </a:bodyPr>
-          <a:lstStyle/>
-          <a:p>
-            <a:pPr algn="l">
-              <a:lnSpc>
-                <a:spcPct val="128000"/>
-              </a:lnSpc>
-              <a:spcAft>
-                <a:spcPts val="0"/>
-              </a:spcAft>
-              <a:defRPr sz="1150" b="0">
-                <a:solidFill>
-                  <a:srgbClr val="15171C"/>
-                </a:solidFill>
-                <a:latin typeface="Helvetica Neue"/>
-              </a:defRPr>
-            </a:pPr>
-            <a:r>
-              <a:t>39</a:t>
-            </a:r>
-          </a:p>
-        </p:txBody>
-      </p:sp>
-      <p:sp>
-        <p:nvSpPr>
-          <p:cNvPr id="29" name="Rectangle 28"/>
-          <p:cNvSpPr/>
-          <p:nvPr/>
-        </p:nvSpPr>
-        <p:spPr>
-          <a:xfrm>
-            <a:off x="6428232" y="3191256"/>
-            <a:ext cx="4937760" cy="7315"/>
-          </a:xfrm>
-          <a:prstGeom prst="rect">
-            <a:avLst/>
-          </a:prstGeom>
-          <a:solidFill>
-            <a:srgbClr val="C9D0DE"/>
-          </a:solidFill>
-          <a:ln>
-            <a:noFill/>
-          </a:ln>
-          <a:effectLst/>
-        </p:spPr>
-        <p:txBody>
-          <a:bodyPr rtlCol="0" anchor="ctr" wrap="square"/>
-          <a:lstStyle/>
-          <a:p>
-            <a:pPr algn="ctr"/>
-          </a:p>
-        </p:txBody>
-      </p:sp>
-      <p:sp>
-        <p:nvSpPr>
-          <p:cNvPr id="30" name="TextBox 29"/>
-          <p:cNvSpPr txBox="1"/>
-          <p:nvPr/>
-        </p:nvSpPr>
-        <p:spPr>
-          <a:xfrm>
-            <a:off x="6428232" y="3264408"/>
-            <a:ext cx="3544214" cy="237744"/>
-          </a:xfrm>
-          <a:prstGeom prst="rect">
-            <a:avLst/>
-          </a:prstGeom>
-          <a:noFill/>
-        </p:spPr>
-        <p:txBody>
-          <a:bodyPr wrap="square" lIns="0" rIns="0" tIns="0" bIns="0" anchor="t">
-            <a:spAutoFit/>
-          </a:bodyPr>
-          <a:lstStyle/>
-          <a:p>
-            <a:pPr algn="l">
-              <a:lnSpc>
-                <a:spcPct val="128000"/>
-              </a:lnSpc>
-              <a:spcAft>
-                <a:spcPts val="0"/>
-              </a:spcAft>
-              <a:defRPr sz="1150" b="0">
-                <a:solidFill>
-                  <a:srgbClr val="15171C"/>
-                </a:solidFill>
-                <a:latin typeface="Helvetica Neue"/>
-              </a:defRPr>
-            </a:pPr>
-            <a:r>
-              <a:t>Shirt → Pullover</a:t>
-            </a:r>
-          </a:p>
-        </p:txBody>
-      </p:sp>
-      <p:sp>
-        <p:nvSpPr>
-          <p:cNvPr id="31" name="TextBox 30"/>
-          <p:cNvSpPr txBox="1"/>
-          <p:nvPr/>
-        </p:nvSpPr>
-        <p:spPr>
-          <a:xfrm>
-            <a:off x="10082174" y="3264408"/>
-            <a:ext cx="1174089" cy="237744"/>
-          </a:xfrm>
-          <a:prstGeom prst="rect">
-            <a:avLst/>
-          </a:prstGeom>
-          <a:noFill/>
-        </p:spPr>
-        <p:txBody>
-          <a:bodyPr wrap="square" lIns="0" rIns="0" tIns="0" bIns="0" anchor="t">
-            <a:spAutoFit/>
-          </a:bodyPr>
-          <a:lstStyle/>
-          <a:p>
-            <a:pPr algn="l">
-              <a:lnSpc>
-                <a:spcPct val="128000"/>
-              </a:lnSpc>
-              <a:spcAft>
-                <a:spcPts val="0"/>
-              </a:spcAft>
-              <a:defRPr sz="1150" b="0">
-                <a:solidFill>
-                  <a:srgbClr val="15171C"/>
-                </a:solidFill>
-                <a:latin typeface="Helvetica Neue"/>
-              </a:defRPr>
-            </a:pPr>
-            <a:r>
-              <a:t>35</a:t>
-            </a:r>
-          </a:p>
-        </p:txBody>
-      </p:sp>
-      <p:sp>
-        <p:nvSpPr>
-          <p:cNvPr id="32" name="Rectangle 31"/>
-          <p:cNvSpPr/>
-          <p:nvPr/>
-        </p:nvSpPr>
-        <p:spPr>
-          <a:xfrm>
-            <a:off x="6428232" y="3611880"/>
-            <a:ext cx="4937760" cy="7315"/>
-          </a:xfrm>
-          <a:prstGeom prst="rect">
-            <a:avLst/>
-          </a:prstGeom>
-          <a:solidFill>
-            <a:srgbClr val="C9D0DE"/>
-          </a:solidFill>
-          <a:ln>
-            <a:noFill/>
-          </a:ln>
-          <a:effectLst/>
-        </p:spPr>
-        <p:txBody>
-          <a:bodyPr rtlCol="0" anchor="ctr" wrap="square"/>
-          <a:lstStyle/>
-          <a:p>
-            <a:pPr algn="ctr"/>
-          </a:p>
-        </p:txBody>
-      </p:sp>
-      <p:sp>
-        <p:nvSpPr>
-          <p:cNvPr id="33" name="TextBox 32"/>
-          <p:cNvSpPr txBox="1"/>
-          <p:nvPr/>
-        </p:nvSpPr>
-        <p:spPr>
-          <a:xfrm>
-            <a:off x="6428232" y="3685032"/>
-            <a:ext cx="3544214" cy="237744"/>
-          </a:xfrm>
-          <a:prstGeom prst="rect">
-            <a:avLst/>
-          </a:prstGeom>
-          <a:noFill/>
-        </p:spPr>
-        <p:txBody>
-          <a:bodyPr wrap="square" lIns="0" rIns="0" tIns="0" bIns="0" anchor="t">
-            <a:spAutoFit/>
-          </a:bodyPr>
-          <a:lstStyle/>
-          <a:p>
-            <a:pPr algn="l">
-              <a:lnSpc>
-                <a:spcPct val="128000"/>
-              </a:lnSpc>
-              <a:spcAft>
-                <a:spcPts val="0"/>
-              </a:spcAft>
-              <a:defRPr sz="1150" b="0">
-                <a:solidFill>
-                  <a:srgbClr val="15171C"/>
-                </a:solidFill>
-                <a:latin typeface="Helvetica Neue"/>
-              </a:defRPr>
-            </a:pPr>
-            <a:r>
-              <a:t>Pullover → Coat</a:t>
-            </a:r>
-          </a:p>
-        </p:txBody>
-      </p:sp>
-      <p:sp>
-        <p:nvSpPr>
-          <p:cNvPr id="34" name="TextBox 33"/>
-          <p:cNvSpPr txBox="1"/>
-          <p:nvPr/>
-        </p:nvSpPr>
-        <p:spPr>
-          <a:xfrm>
-            <a:off x="10082174" y="3685032"/>
-            <a:ext cx="1174089" cy="237744"/>
-          </a:xfrm>
-          <a:prstGeom prst="rect">
-            <a:avLst/>
-          </a:prstGeom>
-          <a:noFill/>
-        </p:spPr>
-        <p:txBody>
-          <a:bodyPr wrap="square" lIns="0" rIns="0" tIns="0" bIns="0" anchor="t">
-            <a:spAutoFit/>
-          </a:bodyPr>
-          <a:lstStyle/>
-          <a:p>
-            <a:pPr algn="l">
-              <a:lnSpc>
-                <a:spcPct val="128000"/>
-              </a:lnSpc>
-              <a:spcAft>
-                <a:spcPts val="0"/>
-              </a:spcAft>
-              <a:defRPr sz="1150" b="0">
-                <a:solidFill>
-                  <a:srgbClr val="15171C"/>
-                </a:solidFill>
-                <a:latin typeface="Helvetica Neue"/>
-              </a:defRPr>
-            </a:pPr>
-            <a:r>
-              <a:t>35</a:t>
-            </a:r>
-          </a:p>
-        </p:txBody>
-      </p:sp>
-      <p:sp>
-        <p:nvSpPr>
-          <p:cNvPr id="35" name="Rounded Rectangle 34"/>
-          <p:cNvSpPr/>
-          <p:nvPr/>
-        </p:nvSpPr>
-        <p:spPr>
-          <a:xfrm>
-            <a:off x="822960" y="4224528"/>
+            <a:off x="822960" y="2148840"/>
             <a:ext cx="10543032" cy="1463040"/>
           </a:xfrm>
           <a:prstGeom prst="roundRect">
@@ -4810,13 +3730,13 @@
       </p:sp>
       <p:sp>
         <p:nvSpPr>
-          <p:cNvPr id="36" name="Rounded Rectangle 35"/>
+          <p:cNvPr id="8" name="Rounded Rectangle 7"/>
           <p:cNvSpPr/>
           <p:nvPr/>
         </p:nvSpPr>
         <p:spPr>
           <a:xfrm>
-            <a:off x="1060704" y="4462272"/>
+            <a:off x="1060704" y="2386584"/>
             <a:ext cx="50292" cy="987552"/>
           </a:xfrm>
           <a:prstGeom prst="roundRect">
@@ -4842,13 +3762,13 @@
       </p:sp>
       <p:sp>
         <p:nvSpPr>
-          <p:cNvPr id="37" name="TextBox 36"/>
-          <p:cNvSpPr txBox="1"/>
-          <p:nvPr/>
-        </p:nvSpPr>
-        <p:spPr>
-          <a:xfrm>
-            <a:off x="1371600" y="4480560"/>
+          <p:cNvPr id="9" name="TextBox 8"/>
+          <p:cNvSpPr txBox="1"/>
+          <p:nvPr/>
+        </p:nvSpPr>
+        <p:spPr>
+          <a:xfrm>
+            <a:off x="1371600" y="2404872"/>
             <a:ext cx="9701784" cy="950976"/>
           </a:xfrm>
           <a:prstGeom prst="rect">
@@ -4877,7 +3797,7 @@
               </a:defRPr>
             </a:pPr>
             <a:r>
-              <a:t>Диагональ у обеих моделей плотная, а вне диагонали видна одна и та же группа: Shirt, T-shirt/top, Pullover и Coat. L2-модель сваливает спорные случаи в класс Shirt, Dropout-модель — наоборот, теряет сам Shirt. Обувь, сумки и брюки обе сети различают почти безошибочно.</a:t>
+              <a:t>Диагональ показывает верные предсказания, значения вне диагонали — ошибки по конкретным парам классов. Обе матрицы взяты из фактического выполнения ноутбука на тестовой подвыборке из 2 000 изображений.</a:t>
             </a:r>
           </a:p>
         </p:txBody>
@@ -5845,7 +4765,7 @@
               </a:defRPr>
             </a:pPr>
             <a:r>
-              <a:t>Linear SVM на 784 признаках дал accuracy 0.8190 за 5.50 с</a:t>
+              <a:t>Linear SVM на 784 признаках дал accuracy 0.8190 за 4.75 с</a:t>
             </a:r>
           </a:p>
         </p:txBody>
@@ -5919,7 +4839,7 @@
               </a:defRPr>
             </a:pPr>
             <a:r>
-              <a:t>CNN из двух свёрточных блоков — 0.8255 за 4.36 с</a:t>
+              <a:t>CNN из двух свёрточных блоков — 0.8965 за 30.53 с</a:t>
             </a:r>
           </a:p>
         </p:txBody>
@@ -5993,7 +4913,7 @@
               </a:defRPr>
             </a:pPr>
             <a:r>
-              <a:t>CNN + L2 (weight_decay = 1e-4) — 0.7840</a:t>
+              <a:t>CNN + L2 (weight_decay = 1e-4) — 0.8995</a:t>
             </a:r>
           </a:p>
         </p:txBody>
@@ -6067,7 +4987,7 @@
               </a:defRPr>
             </a:pPr>
             <a:r>
-              <a:t>CNN + Dropout (p = 0.5) — 0.8080</a:t>
+              <a:t>CNN + Dropout (p = 0.5) — 0.9010</a:t>
             </a:r>
           </a:p>
         </p:txBody>
@@ -6215,7 +5135,7 @@
               </a:defRPr>
             </a:pPr>
             <a:r>
-              <a:t>Ограничения запуска зафиксированы явно: CPU, 10 000 / 2 000, две эпохи</a:t>
+              <a:t>Для воспроизводимого CPU-запуска взяты подвыборки 10 000 / 2 000, обучение — 15 эпох</a:t>
             </a:r>
           </a:p>
         </p:txBody>
@@ -7264,7 +6184,7 @@
               </a:defRPr>
             </a:pPr>
             <a:r>
-              <a:t>2 эпохи</a:t>
+              <a:t>15 эпохи</a:t>
             </a:r>
           </a:p>
         </p:txBody>
@@ -9783,7 +8703,7 @@
               </a:defRPr>
             </a:pPr>
             <a:r>
-              <a:t>CPU, две эпохи, одинаковые подвыборки</a:t>
+              <a:t>Подвыборки Fashion-MNIST, 15 эпох</a:t>
             </a:r>
           </a:p>
         </p:txBody>
@@ -10004,7 +8924,7 @@
               </a:defRPr>
             </a:pPr>
             <a:r>
-              <a:t>Базовая CNN обошла SVM и по точности (0.8255 против 0.8190), и по времени обучения (4.36 с против 5.50 с).</a:t>
+              <a:t>Базовая CNN обошла SVM и по точности (0.8965 против 0.8190), и по времени обучения (30.53 с против 4.75 с).</a:t>
             </a:r>
           </a:p>
         </p:txBody>
@@ -10157,7 +9077,7 @@
               </a:defRPr>
             </a:pPr>
             <a:r>
-              <a:t>За две эпохи ни одна модель не вышла на плато</a:t>
+              <a:t>Сравнение accuracy на тестовой выборке</a:t>
             </a:r>
           </a:p>
         </p:txBody>
@@ -10346,7 +9266,7 @@
               </a:defRPr>
             </a:pPr>
             <a:r>
-              <a:t>0.7840</a:t>
+              <a:t>0.8995</a:t>
             </a:r>
           </a:p>
         </p:txBody>
@@ -10462,7 +9382,7 @@
               </a:defRPr>
             </a:pPr>
             <a:r>
-              <a:t>0.8080</a:t>
+              <a:t>0.9010</a:t>
             </a:r>
           </a:p>
         </p:txBody>
@@ -10504,7 +9424,7 @@
               </a:defRPr>
             </a:pPr>
             <a:r>
-              <a:t>CNN + Dropout: p = 0.5</a:t>
+              <a:t>CNN + Dropout: p = 0.25</a:t>
             </a:r>
           </a:p>
         </p:txBody>
@@ -10578,7 +9498,7 @@
               </a:defRPr>
             </a:pPr>
             <a:r>
-              <a:t>0.8255</a:t>
+              <a:t>0.8965</a:t>
             </a:r>
           </a:p>
         </p:txBody>
@@ -11628,7 +10548,7 @@
       </p:sp>
       <p:pic>
         <p:nvPicPr>
-          <p:cNvPr id="7" name="Picture 6" descr="confusion.png"/>
+          <p:cNvPr id="7" name="Picture 6" descr="notebook_confusion.png"/>
           <p:cNvPicPr>
             <a:picLocks noChangeAspect="1"/>
           </p:cNvPicPr>
@@ -11643,7 +10563,7 @@
         <p:spPr>
           <a:xfrm>
             <a:off x="822960" y="1883664"/>
-            <a:ext cx="10543032" cy="3840480"/>
+            <a:ext cx="10543032" cy="3912194"/>
           </a:xfrm>
           <a:prstGeom prst="rect">
             <a:avLst/>
@@ -11665,7 +10585,7 @@
         </p:nvSpPr>
         <p:spPr>
           <a:xfrm>
-            <a:off x="822960" y="5925312"/>
+            <a:off x="822960" y="5997025"/>
             <a:ext cx="10543032" cy="274320"/>
           </a:xfrm>
           <a:prstGeom prst="rect">
